--- a/SmartGrid/Commercial/ECOGRID_RESORT_Investors_EN.pptx
+++ b/SmartGrid/Commercial/ECOGRID_RESORT_Investors_EN.pptx
@@ -6,6 +6,7 @@
   </p:sldMasterIdLst>
   <p:sldIdLst>
     <p:sldId id="256" r:id="rId2"/>
+    <p:sldId id="266" r:id="rId17"/>
     <p:sldId id="257" r:id="rId3"/>
     <p:sldId id="258" r:id="rId4"/>
     <p:sldId id="259" r:id="rId5"/>
@@ -2190,7 +2191,7 @@
                 <a:ea typeface="Calibri" pitchFamily="34" charset="-122"/>
                 <a:cs typeface="Calibri" pitchFamily="34" charset="-120"/>
               </a:rPr>
-              <a:t>Solar production · battery storage · AI energy management · client app — built for outdoor tourism</a:t>
+              <a:t>Multi-brand SaaS platform orchestrating solar generation, storage and usage — built for open-air tourism</a:t>
             </a:r>
             <a:endParaRPr lang="en-US" sz="1300" dirty="0"/>
           </a:p>
@@ -3401,6 +3402,975 @@
               <a:t>Co-development &amp; co-investment proposal · May 2026</a:t>
             </a:r>
             <a:endParaRPr lang="en-US" sz="900" dirty="0"/>
+          </a:p>
+        </p:txBody>
+      </p:sp>
+    </p:spTree>
+  </p:cSld>
+  <p:clrMapOvr>
+    <a:masterClrMapping/>
+  </p:clrMapOvr>
+</p:sld>
+</file>
+
+<file path=ppt/slides/slide11.xml><?xml version="1.0" encoding="utf-8"?>
+<p:sld xmlns:a="http://schemas.openxmlformats.org/drawingml/2006/main" xmlns:p="http://schemas.openxmlformats.org/presentationml/2006/main" xmlns:r="http://schemas.openxmlformats.org/officeDocument/2006/relationships">
+  <p:cSld>
+    <p:spTree>
+      <p:nvGrpSpPr>
+        <p:cNvPr id="1" name=""/>
+        <p:cNvGrpSpPr/>
+        <p:nvPr/>
+      </p:nvGrpSpPr>
+      <p:grpSpPr/>
+      <p:sp>
+        <p:nvSpPr>
+          <p:cNvPr id="2" name="Shape 0"/>
+          <p:cNvSpPr/>
+          <p:nvPr/>
+        </p:nvSpPr>
+        <p:spPr>
+          <a:xfrm>
+            <a:off x="457200" y="384048"/>
+            <a:ext cx="566928" cy="566928"/>
+          </a:xfrm>
+          <a:prstGeom prst="ellipse">
+            <a:avLst/>
+          </a:prstGeom>
+          <a:solidFill>
+            <a:srgbClr val="16A39A"/>
+          </a:solidFill>
+          <a:ln/>
+        </p:spPr>
+        <p:txBody>
+          <a:bodyPr/>
+          <a:p/>
+        </p:txBody>
+      </p:sp>
+      <p:sp>
+        <p:nvSpPr>
+          <p:cNvPr id="3" name="Text 1"/>
+          <p:cNvSpPr/>
+          <p:nvPr/>
+        </p:nvSpPr>
+        <p:spPr>
+          <a:xfrm>
+            <a:off x="457200" y="384048"/>
+            <a:ext cx="566928" cy="566928"/>
+          </a:xfrm>
+          <a:prstGeom prst="rect">
+            <a:avLst/>
+          </a:prstGeom>
+          <a:noFill/>
+          <a:ln/>
+        </p:spPr>
+        <p:txBody>
+          <a:bodyPr wrap="square" lIns="0" tIns="0" rIns="0" bIns="0" rtlCol="0" anchor="ctr"/>
+          <a:lstStyle/>
+          <a:p>
+            <a:pPr algn="ctr" indent="0" marL="0">
+              <a:buNone/>
+            </a:pPr>
+            <a:r>
+              <a:rPr lang="en-US" sz="2200" b="1" dirty="0">
+                <a:solidFill>
+                  <a:srgbClr val="FFFFFF"/>
+                </a:solidFill>
+                <a:latin typeface="Georgia" pitchFamily="34" charset="0"/>
+                <a:ea typeface="Georgia" pitchFamily="34" charset="-122"/>
+                <a:cs typeface="Georgia" pitchFamily="34" charset="-120"/>
+              </a:rPr>
+              <a:t/>
+            </a:r>
+            <a:endParaRPr lang="en-US" sz="2200" dirty="0"/>
+          </a:p>
+        </p:txBody>
+      </p:sp>
+      <p:sp>
+        <p:nvSpPr>
+          <p:cNvPr id="4" name="Text 2"/>
+          <p:cNvSpPr/>
+          <p:nvPr/>
+        </p:nvSpPr>
+        <p:spPr>
+          <a:xfrm>
+            <a:off x="1170432" y="384048"/>
+            <a:ext cx="10424160" cy="237744"/>
+          </a:xfrm>
+          <a:prstGeom prst="rect">
+            <a:avLst/>
+          </a:prstGeom>
+          <a:noFill/>
+          <a:ln/>
+        </p:spPr>
+        <p:txBody>
+          <a:bodyPr wrap="square" lIns="0" tIns="0" rIns="0" bIns="0" rtlCol="0" anchor="ctr"/>
+          <a:lstStyle/>
+          <a:p>
+            <a:pPr indent="0" marL="0">
+              <a:buNone/>
+            </a:pPr>
+            <a:r>
+              <a:rPr lang="en-US" sz="1100" b="1" spc="200" kern="0" dirty="0">
+                <a:solidFill>
+                  <a:srgbClr val="0E8A82"/>
+                </a:solidFill>
+                <a:latin typeface="Calibri" pitchFamily="34" charset="0"/>
+                <a:ea typeface="Calibri" pitchFamily="34" charset="-122"/>
+                <a:cs typeface="Calibri" pitchFamily="34" charset="-120"/>
+              </a:rPr>
+              <a:t>OUR FOCUS</a:t>
+            </a:r>
+            <a:endParaRPr lang="en-US" sz="1100" dirty="0"/>
+          </a:p>
+        </p:txBody>
+      </p:sp>
+      <p:sp>
+        <p:nvSpPr>
+          <p:cNvPr id="5" name="Text 3"/>
+          <p:cNvSpPr/>
+          <p:nvPr/>
+        </p:nvSpPr>
+        <p:spPr>
+          <a:xfrm>
+            <a:off x="1170432" y="603504"/>
+            <a:ext cx="10515600" cy="566928"/>
+          </a:xfrm>
+          <a:prstGeom prst="rect">
+            <a:avLst/>
+          </a:prstGeom>
+          <a:noFill/>
+          <a:ln/>
+        </p:spPr>
+        <p:txBody>
+          <a:bodyPr wrap="square" lIns="0" tIns="0" rIns="0" bIns="0" rtlCol="0" anchor="ctr"/>
+          <a:lstStyle/>
+          <a:p>
+            <a:pPr indent="0" marL="0">
+              <a:buNone/>
+            </a:pPr>
+            <a:r>
+              <a:rPr lang="en-US" sz="2700" b="1" dirty="0">
+                <a:solidFill>
+                  <a:srgbClr val="0E2A3B"/>
+                </a:solidFill>
+                <a:latin typeface="Georgia" pitchFamily="34" charset="0"/>
+                <a:ea typeface="Georgia" pitchFamily="34" charset="-122"/>
+                <a:cs typeface="Georgia" pitchFamily="34" charset="-120"/>
+              </a:rPr>
+              <a:t>What we are — and what we are not</a:t>
+            </a:r>
+            <a:endParaRPr lang="en-US" sz="2700" dirty="0"/>
+          </a:p>
+        </p:txBody>
+      </p:sp>
+      <p:sp>
+        <p:nvSpPr>
+          <p:cNvPr id="6" name="Shape 4"/>
+          <p:cNvSpPr/>
+          <p:nvPr/>
+        </p:nvSpPr>
+        <p:spPr>
+          <a:xfrm>
+            <a:off x="457200" y="1417320"/>
+            <a:ext cx="3630168" cy="2743200"/>
+          </a:xfrm>
+          <a:prstGeom prst="rect">
+            <a:avLst/>
+          </a:prstGeom>
+          <a:solidFill>
+            <a:srgbClr val="FFFFFF"/>
+          </a:solidFill>
+          <a:ln w="12700">
+            <a:solidFill>
+              <a:srgbClr val="E3DECF"/>
+            </a:solidFill>
+            <a:prstDash val="solid"/>
+          </a:ln>
+          <a:effectLst>
+            <a:outerShdw sx="100000" sy="100000" kx="0" ky="0" algn="bl" rotWithShape="0" blurRad="88900" dist="38100" dir="8100000">
+              <a:srgbClr val="0E2A3B">
+                <a:alpha val="16000"/>
+              </a:srgbClr>
+            </a:outerShdw>
+          </a:effectLst>
+        </p:spPr>
+        <p:txBody>
+          <a:bodyPr/>
+          <a:p/>
+        </p:txBody>
+      </p:sp>
+      <p:sp>
+        <p:nvSpPr>
+          <p:cNvPr id="7" name="Shape 5"/>
+          <p:cNvSpPr/>
+          <p:nvPr/>
+        </p:nvSpPr>
+        <p:spPr>
+          <a:xfrm>
+            <a:off x="457200" y="1417320"/>
+            <a:ext cx="73152" cy="2743200"/>
+          </a:xfrm>
+          <a:prstGeom prst="rect">
+            <a:avLst/>
+          </a:prstGeom>
+          <a:solidFill>
+            <a:srgbClr val="16A39A"/>
+          </a:solidFill>
+          <a:ln/>
+        </p:spPr>
+        <p:txBody>
+          <a:bodyPr/>
+          <a:p/>
+        </p:txBody>
+      </p:sp>
+      <p:sp>
+        <p:nvSpPr>
+          <p:cNvPr id="8" name="Text 6"/>
+          <p:cNvSpPr/>
+          <p:nvPr/>
+        </p:nvSpPr>
+        <p:spPr>
+          <a:xfrm>
+            <a:off x="658368" y="1545336"/>
+            <a:ext cx="3264408" cy="365760"/>
+          </a:xfrm>
+          <a:prstGeom prst="rect">
+            <a:avLst/>
+          </a:prstGeom>
+          <a:noFill/>
+          <a:ln/>
+        </p:spPr>
+        <p:txBody>
+          <a:bodyPr wrap="square" lIns="0" tIns="0" rIns="0" bIns="0" rtlCol="0" anchor="t"/>
+          <a:lstStyle/>
+          <a:p>
+            <a:pPr indent="0" marL="0">
+              <a:buNone/>
+            </a:pPr>
+            <a:r>
+              <a:rPr lang="en-US" sz="1400" b="1" dirty="0">
+                <a:solidFill>
+                  <a:srgbClr val="0E2A3B"/>
+                </a:solidFill>
+                <a:latin typeface="Georgia" pitchFamily="34" charset="0"/>
+                <a:ea typeface="Georgia" pitchFamily="34" charset="-122"/>
+                <a:cs typeface="Georgia" pitchFamily="34" charset="-120"/>
+              </a:rPr>
+              <a:t>What we ARE</a:t>
+            </a:r>
+            <a:endParaRPr lang="en-US" sz="1400" dirty="0"/>
+          </a:p>
+        </p:txBody>
+      </p:sp>
+      <p:sp>
+        <p:nvSpPr>
+          <p:cNvPr id="9" name="Text 7"/>
+          <p:cNvSpPr/>
+          <p:nvPr/>
+        </p:nvSpPr>
+        <p:spPr>
+          <a:xfrm>
+            <a:off x="676656" y="1929384"/>
+            <a:ext cx="3227832" cy="2139696"/>
+          </a:xfrm>
+          <a:prstGeom prst="rect">
+            <a:avLst/>
+          </a:prstGeom>
+          <a:noFill/>
+          <a:ln/>
+        </p:spPr>
+        <p:txBody>
+          <a:bodyPr wrap="square" lIns="0" tIns="0" rIns="0" bIns="0" rtlCol="0" anchor="t"/>
+          <a:lstStyle/>
+          <a:p>
+            <a:pPr marL="152400" indent="-152400">
+              <a:lnSpc>
+                <a:spcPct val="102000"/>
+              </a:lnSpc>
+              <a:spcAft>
+                <a:spcPts val="300"/>
+              </a:spcAft>
+              <a:buSzPct val="100000"/>
+              <a:buChar char="•"/>
+            </a:pPr>
+            <a:r>
+              <a:rPr lang="en-US" sz="1050" dirty="0">
+                <a:solidFill>
+                  <a:srgbClr val="1F2D36"/>
+                </a:solidFill>
+                <a:latin typeface="Calibri" pitchFamily="34" charset="0"/>
+                <a:ea typeface="Calibri" pitchFamily="34" charset="-122"/>
+                <a:cs typeface="Calibri" pitchFamily="34" charset="-120"/>
+              </a:rPr>
+              <a:t>The SaaS platform that orchestrates multiple hardware brands</a:t>
+            </a:r>
+            <a:endParaRPr lang="en-US" sz="1050" dirty="0"/>
+          </a:p>
+          <a:p>
+            <a:pPr marL="152400" indent="-152400">
+              <a:lnSpc>
+                <a:spcPct val="102000"/>
+              </a:lnSpc>
+              <a:spcAft>
+                <a:spcPts val="300"/>
+              </a:spcAft>
+              <a:buSzPct val="100000"/>
+              <a:buChar char="•"/>
+            </a:pPr>
+            <a:r>
+              <a:rPr lang="en-US" sz="1050" dirty="0">
+                <a:solidFill>
+                  <a:srgbClr val="1F2D36"/>
+                </a:solidFill>
+                <a:latin typeface="Calibri" pitchFamily="34" charset="0"/>
+                <a:ea typeface="Calibri" pitchFamily="34" charset="-122"/>
+                <a:cs typeface="Calibri" pitchFamily="34" charset="-120"/>
+              </a:rPr>
+              <a:t>The tourism vertical: guest app, occupancy, ESG, labels</a:t>
+            </a:r>
+            <a:endParaRPr lang="en-US" sz="1050" dirty="0"/>
+          </a:p>
+          <a:p>
+            <a:pPr marL="152400" indent="-152400">
+              <a:lnSpc>
+                <a:spcPct val="102000"/>
+              </a:lnSpc>
+              <a:spcAft>
+                <a:spcPts val="300"/>
+              </a:spcAft>
+              <a:buSzPct val="100000"/>
+              <a:buChar char="•"/>
+            </a:pPr>
+            <a:r>
+              <a:rPr lang="en-US" sz="1050" dirty="0">
+                <a:solidFill>
+                  <a:srgbClr val="1F2D36"/>
+                </a:solidFill>
+                <a:latin typeface="Calibri" pitchFamily="34" charset="0"/>
+                <a:ea typeface="Calibri" pitchFamily="34" charset="-122"/>
+                <a:cs typeface="Calibri" pitchFamily="34" charset="-120"/>
+              </a:rPr>
+              <a:t>Distribution access to campsites via the COREPROMA ecosystem</a:t>
+            </a:r>
+            <a:endParaRPr lang="en-US" sz="1050" dirty="0"/>
+          </a:p>
+        </p:txBody>
+      </p:sp>
+      <p:sp>
+        <p:nvSpPr>
+          <p:cNvPr id="10" name="Shape 8"/>
+          <p:cNvSpPr/>
+          <p:nvPr/>
+        </p:nvSpPr>
+        <p:spPr>
+          <a:xfrm>
+            <a:off x="4270248" y="1417320"/>
+            <a:ext cx="3630168" cy="2743200"/>
+          </a:xfrm>
+          <a:prstGeom prst="rect">
+            <a:avLst/>
+          </a:prstGeom>
+          <a:solidFill>
+            <a:srgbClr val="FFFFFF"/>
+          </a:solidFill>
+          <a:ln w="12700">
+            <a:solidFill>
+              <a:srgbClr val="E3DECF"/>
+            </a:solidFill>
+            <a:prstDash val="solid"/>
+          </a:ln>
+          <a:effectLst>
+            <a:outerShdw sx="100000" sy="100000" kx="0" ky="0" algn="bl" rotWithShape="0" blurRad="88900" dist="38100" dir="8100000">
+              <a:srgbClr val="0E2A3B">
+                <a:alpha val="16000"/>
+              </a:srgbClr>
+            </a:outerShdw>
+          </a:effectLst>
+        </p:spPr>
+        <p:txBody>
+          <a:bodyPr/>
+          <a:p/>
+        </p:txBody>
+      </p:sp>
+      <p:sp>
+        <p:nvSpPr>
+          <p:cNvPr id="11" name="Shape 9"/>
+          <p:cNvSpPr/>
+          <p:nvPr/>
+        </p:nvSpPr>
+        <p:spPr>
+          <a:xfrm>
+            <a:off x="4270248" y="1417320"/>
+            <a:ext cx="73152" cy="2743200"/>
+          </a:xfrm>
+          <a:prstGeom prst="rect">
+            <a:avLst/>
+          </a:prstGeom>
+          <a:solidFill>
+            <a:srgbClr val="4CA66B"/>
+          </a:solidFill>
+          <a:ln/>
+        </p:spPr>
+        <p:txBody>
+          <a:bodyPr/>
+          <a:p/>
+        </p:txBody>
+      </p:sp>
+      <p:sp>
+        <p:nvSpPr>
+          <p:cNvPr id="12" name="Text 10"/>
+          <p:cNvSpPr/>
+          <p:nvPr/>
+        </p:nvSpPr>
+        <p:spPr>
+          <a:xfrm>
+            <a:off x="4471416" y="1545336"/>
+            <a:ext cx="3264408" cy="365760"/>
+          </a:xfrm>
+          <a:prstGeom prst="rect">
+            <a:avLst/>
+          </a:prstGeom>
+          <a:noFill/>
+          <a:ln/>
+        </p:spPr>
+        <p:txBody>
+          <a:bodyPr wrap="square" lIns="0" tIns="0" rIns="0" bIns="0" rtlCol="0" anchor="t"/>
+          <a:lstStyle/>
+          <a:p>
+            <a:pPr indent="0" marL="0">
+              <a:buNone/>
+            </a:pPr>
+            <a:r>
+              <a:rPr lang="en-US" sz="1400" b="1" dirty="0">
+                <a:solidFill>
+                  <a:srgbClr val="0E2A3B"/>
+                </a:solidFill>
+                <a:latin typeface="Georgia" pitchFamily="34" charset="0"/>
+                <a:ea typeface="Georgia" pitchFamily="34" charset="-122"/>
+                <a:cs typeface="Georgia" pitchFamily="34" charset="-120"/>
+              </a:rPr>
+              <a:t>What we are NOT</a:t>
+            </a:r>
+            <a:endParaRPr lang="en-US" sz="1400" dirty="0"/>
+          </a:p>
+        </p:txBody>
+      </p:sp>
+      <p:sp>
+        <p:nvSpPr>
+          <p:cNvPr id="13" name="Text 11"/>
+          <p:cNvSpPr/>
+          <p:nvPr/>
+        </p:nvSpPr>
+        <p:spPr>
+          <a:xfrm>
+            <a:off x="4489704" y="1929384"/>
+            <a:ext cx="3227832" cy="2139696"/>
+          </a:xfrm>
+          <a:prstGeom prst="rect">
+            <a:avLst/>
+          </a:prstGeom>
+          <a:noFill/>
+          <a:ln/>
+        </p:spPr>
+        <p:txBody>
+          <a:bodyPr wrap="square" lIns="0" tIns="0" rIns="0" bIns="0" rtlCol="0" anchor="t"/>
+          <a:lstStyle/>
+          <a:p>
+            <a:pPr marL="152400" indent="-152400">
+              <a:lnSpc>
+                <a:spcPct val="102000"/>
+              </a:lnSpc>
+              <a:spcAft>
+                <a:spcPts val="300"/>
+              </a:spcAft>
+              <a:buSzPct val="100000"/>
+              <a:buChar char="•"/>
+            </a:pPr>
+            <a:r>
+              <a:rPr lang="en-US" sz="1050" dirty="0">
+                <a:solidFill>
+                  <a:srgbClr val="1F2D36"/>
+                </a:solidFill>
+                <a:latin typeface="Calibri" pitchFamily="34" charset="0"/>
+                <a:ea typeface="Calibri" pitchFamily="34" charset="-122"/>
+                <a:cs typeface="Calibri" pitchFamily="34" charset="-120"/>
+              </a:rPr>
+              <a:t>A hardware manufacturer (inverters, batteries)</a:t>
+            </a:r>
+            <a:endParaRPr lang="en-US" sz="1050" dirty="0"/>
+          </a:p>
+          <a:p>
+            <a:pPr marL="152400" indent="-152400">
+              <a:lnSpc>
+                <a:spcPct val="102000"/>
+              </a:lnSpc>
+              <a:spcAft>
+                <a:spcPts val="300"/>
+              </a:spcAft>
+              <a:buSzPct val="100000"/>
+              <a:buChar char="•"/>
+            </a:pPr>
+            <a:r>
+              <a:rPr lang="en-US" sz="1050" dirty="0">
+                <a:solidFill>
+                  <a:srgbClr val="1F2D36"/>
+                </a:solidFill>
+                <a:latin typeface="Calibri" pitchFamily="34" charset="0"/>
+                <a:ea typeface="Calibri" pitchFamily="34" charset="-122"/>
+                <a:cs typeface="Calibri" pitchFamily="34" charset="-120"/>
+              </a:rPr>
+              <a:t>A mere inverter EMS — that is a commodity</a:t>
+            </a:r>
+            <a:endParaRPr lang="en-US" sz="1050" dirty="0"/>
+          </a:p>
+          <a:p>
+            <a:pPr marL="152400" indent="-152400">
+              <a:lnSpc>
+                <a:spcPct val="102000"/>
+              </a:lnSpc>
+              <a:spcAft>
+                <a:spcPts val="300"/>
+              </a:spcAft>
+              <a:buSzPct val="100000"/>
+              <a:buChar char="•"/>
+            </a:pPr>
+            <a:r>
+              <a:rPr lang="en-US" sz="1050" dirty="0">
+                <a:solidFill>
+                  <a:srgbClr val="1F2D36"/>
+                </a:solidFill>
+                <a:latin typeface="Calibri" pitchFamily="34" charset="0"/>
+                <a:ea typeface="Calibri" pitchFamily="34" charset="-122"/>
+                <a:cs typeface="Calibri" pitchFamily="34" charset="-120"/>
+              </a:rPr>
+              <a:t>Locked to a single brand</a:t>
+            </a:r>
+            <a:endParaRPr lang="en-US" sz="1050" dirty="0"/>
+          </a:p>
+        </p:txBody>
+      </p:sp>
+      <p:sp>
+        <p:nvSpPr>
+          <p:cNvPr id="14" name="Shape 12"/>
+          <p:cNvSpPr/>
+          <p:nvPr/>
+        </p:nvSpPr>
+        <p:spPr>
+          <a:xfrm>
+            <a:off x="8083296" y="1417320"/>
+            <a:ext cx="3621024" cy="2743200"/>
+          </a:xfrm>
+          <a:prstGeom prst="rect">
+            <a:avLst/>
+          </a:prstGeom>
+          <a:solidFill>
+            <a:srgbClr val="FFFFFF"/>
+          </a:solidFill>
+          <a:ln w="12700">
+            <a:solidFill>
+              <a:srgbClr val="E3DECF"/>
+            </a:solidFill>
+            <a:prstDash val="solid"/>
+          </a:ln>
+          <a:effectLst>
+            <a:outerShdw sx="100000" sy="100000" kx="0" ky="0" algn="bl" rotWithShape="0" blurRad="88900" dist="38100" dir="8100000">
+              <a:srgbClr val="0E2A3B">
+                <a:alpha val="16000"/>
+              </a:srgbClr>
+            </a:outerShdw>
+          </a:effectLst>
+        </p:spPr>
+        <p:txBody>
+          <a:bodyPr/>
+          <a:p/>
+        </p:txBody>
+      </p:sp>
+      <p:sp>
+        <p:nvSpPr>
+          <p:cNvPr id="15" name="Shape 13"/>
+          <p:cNvSpPr/>
+          <p:nvPr/>
+        </p:nvSpPr>
+        <p:spPr>
+          <a:xfrm>
+            <a:off x="8083296" y="1417320"/>
+            <a:ext cx="73152" cy="2743200"/>
+          </a:xfrm>
+          <a:prstGeom prst="rect">
+            <a:avLst/>
+          </a:prstGeom>
+          <a:solidFill>
+            <a:srgbClr val="E8A23D"/>
+          </a:solidFill>
+          <a:ln/>
+        </p:spPr>
+        <p:txBody>
+          <a:bodyPr/>
+          <a:p/>
+        </p:txBody>
+      </p:sp>
+      <p:sp>
+        <p:nvSpPr>
+          <p:cNvPr id="16" name="Text 14"/>
+          <p:cNvSpPr/>
+          <p:nvPr/>
+        </p:nvSpPr>
+        <p:spPr>
+          <a:xfrm>
+            <a:off x="8284464" y="1545336"/>
+            <a:ext cx="3255264" cy="365760"/>
+          </a:xfrm>
+          <a:prstGeom prst="rect">
+            <a:avLst/>
+          </a:prstGeom>
+          <a:noFill/>
+          <a:ln/>
+        </p:spPr>
+        <p:txBody>
+          <a:bodyPr wrap="square" lIns="0" tIns="0" rIns="0" bIns="0" rtlCol="0" anchor="t"/>
+          <a:lstStyle/>
+          <a:p>
+            <a:pPr indent="0" marL="0">
+              <a:buNone/>
+            </a:pPr>
+            <a:r>
+              <a:rPr lang="en-US" sz="1400" b="1" dirty="0">
+                <a:solidFill>
+                  <a:srgbClr val="0E2A3B"/>
+                </a:solidFill>
+                <a:latin typeface="Georgia" pitchFamily="34" charset="0"/>
+                <a:ea typeface="Georgia" pitchFamily="34" charset="-122"/>
+                <a:cs typeface="Georgia" pitchFamily="34" charset="-120"/>
+              </a:rPr>
+              <a:t>Our moat</a:t>
+            </a:r>
+            <a:endParaRPr lang="en-US" sz="1400" dirty="0"/>
+          </a:p>
+        </p:txBody>
+      </p:sp>
+      <p:sp>
+        <p:nvSpPr>
+          <p:cNvPr id="17" name="Text 15"/>
+          <p:cNvSpPr/>
+          <p:nvPr/>
+        </p:nvSpPr>
+        <p:spPr>
+          <a:xfrm>
+            <a:off x="8302752" y="1929384"/>
+            <a:ext cx="3218688" cy="2139696"/>
+          </a:xfrm>
+          <a:prstGeom prst="rect">
+            <a:avLst/>
+          </a:prstGeom>
+          <a:noFill/>
+          <a:ln/>
+        </p:spPr>
+        <p:txBody>
+          <a:bodyPr wrap="square" lIns="0" tIns="0" rIns="0" bIns="0" rtlCol="0" anchor="t"/>
+          <a:lstStyle/>
+          <a:p>
+            <a:pPr marL="152400" indent="-152400">
+              <a:lnSpc>
+                <a:spcPct val="102000"/>
+              </a:lnSpc>
+              <a:spcAft>
+                <a:spcPts val="300"/>
+              </a:spcAft>
+              <a:buSzPct val="100000"/>
+              <a:buChar char="•"/>
+            </a:pPr>
+            <a:r>
+              <a:rPr lang="en-US" sz="1050" dirty="0">
+                <a:solidFill>
+                  <a:srgbClr val="1F2D36"/>
+                </a:solidFill>
+                <a:latin typeface="Calibri" pitchFamily="34" charset="0"/>
+                <a:ea typeface="Calibri" pitchFamily="34" charset="-122"/>
+                <a:cs typeface="Calibri" pitchFamily="34" charset="-120"/>
+              </a:rPr>
+              <a:t>Distribution: already-existing access to the segment</a:t>
+            </a:r>
+            <a:endParaRPr lang="en-US" sz="1050" dirty="0"/>
+          </a:p>
+          <a:p>
+            <a:pPr marL="152400" indent="-152400">
+              <a:lnSpc>
+                <a:spcPct val="102000"/>
+              </a:lnSpc>
+              <a:spcAft>
+                <a:spcPts val="300"/>
+              </a:spcAft>
+              <a:buSzPct val="100000"/>
+              <a:buChar char="•"/>
+            </a:pPr>
+            <a:r>
+              <a:rPr lang="en-US" sz="1050" dirty="0">
+                <a:solidFill>
+                  <a:srgbClr val="1F2D36"/>
+                </a:solidFill>
+                <a:latin typeface="Calibri" pitchFamily="34" charset="0"/>
+                <a:ea typeface="Calibri" pitchFamily="34" charset="-122"/>
+                <a:cs typeface="Calibri" pitchFamily="34" charset="-120"/>
+              </a:rPr>
+              <a:t>Occupancy data (bookings) → AI load forecasting</a:t>
+            </a:r>
+            <a:endParaRPr lang="en-US" sz="1050" dirty="0"/>
+          </a:p>
+          <a:p>
+            <a:pPr marL="152400" indent="-152400">
+              <a:lnSpc>
+                <a:spcPct val="102000"/>
+              </a:lnSpc>
+              <a:spcAft>
+                <a:spcPts val="300"/>
+              </a:spcAft>
+              <a:buSzPct val="100000"/>
+              <a:buChar char="•"/>
+            </a:pPr>
+            <a:r>
+              <a:rPr lang="en-US" sz="1050" dirty="0">
+                <a:solidFill>
+                  <a:srgbClr val="1F2D36"/>
+                </a:solidFill>
+                <a:latin typeface="Calibri" pitchFamily="34" charset="0"/>
+                <a:ea typeface="Calibri" pitchFamily="34" charset="-122"/>
+                <a:cs typeface="Calibri" pitchFamily="34" charset="-120"/>
+              </a:rPr>
+              <a:t>Multi-brand orchestration + tourism / ESG layer</a:t>
+            </a:r>
+            <a:endParaRPr lang="en-US" sz="1050" dirty="0"/>
+          </a:p>
+        </p:txBody>
+      </p:sp>
+      <p:sp>
+        <p:nvSpPr>
+          <p:cNvPr id="18" name="Shape 16"/>
+          <p:cNvSpPr/>
+          <p:nvPr/>
+        </p:nvSpPr>
+        <p:spPr>
+          <a:xfrm>
+            <a:off x="457200" y="4370832"/>
+            <a:ext cx="11247120" cy="1051560"/>
+          </a:xfrm>
+          <a:prstGeom prst="rect">
+            <a:avLst/>
+          </a:prstGeom>
+          <a:solidFill>
+            <a:srgbClr val="0E2A3B"/>
+          </a:solidFill>
+          <a:ln/>
+        </p:spPr>
+        <p:txBody>
+          <a:bodyPr/>
+          <a:p/>
+        </p:txBody>
+      </p:sp>
+      <p:sp>
+        <p:nvSpPr>
+          <p:cNvPr id="19" name="Shape 17"/>
+          <p:cNvSpPr/>
+          <p:nvPr/>
+        </p:nvSpPr>
+        <p:spPr>
+          <a:xfrm>
+            <a:off x="457200" y="4370832"/>
+            <a:ext cx="91440" cy="1051560"/>
+          </a:xfrm>
+          <a:prstGeom prst="rect">
+            <a:avLst/>
+          </a:prstGeom>
+          <a:solidFill>
+            <a:srgbClr val="E8A23D"/>
+          </a:solidFill>
+          <a:ln/>
+        </p:spPr>
+        <p:txBody>
+          <a:bodyPr/>
+          <a:p/>
+        </p:txBody>
+      </p:sp>
+      <p:sp>
+        <p:nvSpPr>
+          <p:cNvPr id="20" name="Text 18"/>
+          <p:cNvSpPr/>
+          <p:nvPr/>
+        </p:nvSpPr>
+        <p:spPr>
+          <a:xfrm>
+            <a:off x="713232" y="4480560"/>
+            <a:ext cx="10881360" cy="274320"/>
+          </a:xfrm>
+          <a:prstGeom prst="rect">
+            <a:avLst/>
+          </a:prstGeom>
+          <a:noFill/>
+          <a:ln/>
+        </p:spPr>
+        <p:txBody>
+          <a:bodyPr wrap="square" lIns="0" tIns="0" rIns="0" bIns="0" rtlCol="0" anchor="ctr"/>
+          <a:lstStyle/>
+          <a:p>
+            <a:pPr indent="0" marL="0">
+              <a:buNone/>
+            </a:pPr>
+            <a:r>
+              <a:rPr lang="en-US" sz="1300" b="1" dirty="0">
+                <a:solidFill>
+                  <a:srgbClr val="63E0D2"/>
+                </a:solidFill>
+                <a:latin typeface="Georgia" pitchFamily="34" charset="0"/>
+                <a:ea typeface="Georgia" pitchFamily="34" charset="-122"/>
+                <a:cs typeface="Georgia" pitchFamily="34" charset="-120"/>
+              </a:rPr>
+              <a:t>In plain terms</a:t>
+            </a:r>
+            <a:endParaRPr lang="en-US" sz="1300" dirty="0"/>
+          </a:p>
+        </p:txBody>
+      </p:sp>
+      <p:sp>
+        <p:nvSpPr>
+          <p:cNvPr id="21" name="Text 19"/>
+          <p:cNvSpPr/>
+          <p:nvPr/>
+        </p:nvSpPr>
+        <p:spPr>
+          <a:xfrm>
+            <a:off x="713232" y="4754880"/>
+            <a:ext cx="10881360" cy="621792"/>
+          </a:xfrm>
+          <a:prstGeom prst="rect">
+            <a:avLst/>
+          </a:prstGeom>
+          <a:noFill/>
+          <a:ln/>
+        </p:spPr>
+        <p:txBody>
+          <a:bodyPr wrap="square" lIns="0" tIns="0" rIns="0" bIns="0" rtlCol="0" anchor="t"/>
+          <a:lstStyle/>
+          <a:p>
+            <a:pPr indent="0" marL="0">
+              <a:lnSpc>
+                <a:spcPct val="104000"/>
+              </a:lnSpc>
+              <a:buNone/>
+            </a:pPr>
+            <a:r>
+              <a:rPr lang="en-US" sz="1100" dirty="0">
+                <a:solidFill>
+                  <a:srgbClr val="DCE7EB"/>
+                </a:solidFill>
+                <a:latin typeface="Calibri" pitchFamily="34" charset="0"/>
+                <a:ea typeface="Calibri" pitchFamily="34" charset="-122"/>
+                <a:cs typeface="Calibri" pitchFamily="34" charset="-120"/>
+              </a:rPr>
+              <a:t>FoxESS, SolarEdge, Huawei, OCPP… = integrated hardware and data sources. ECOGRID is the software layer above: hardware-agnostic, wired into tourism and COREPROMA distribution.</a:t>
+            </a:r>
+            <a:endParaRPr lang="en-US" sz="1100" dirty="0"/>
+          </a:p>
+        </p:txBody>
+      </p:sp>
+      <p:sp>
+        <p:nvSpPr>
+          <p:cNvPr id="22" name="Shape 20"/>
+          <p:cNvSpPr/>
+          <p:nvPr/>
+        </p:nvSpPr>
+        <p:spPr>
+          <a:xfrm>
+            <a:off x="0" y="6547104"/>
+            <a:ext cx="12161520" cy="310896"/>
+          </a:xfrm>
+          <a:prstGeom prst="rect">
+            <a:avLst/>
+          </a:prstGeom>
+          <a:solidFill>
+            <a:srgbClr val="0E2A3B"/>
+          </a:solidFill>
+          <a:ln/>
+        </p:spPr>
+        <p:txBody>
+          <a:bodyPr/>
+          <a:p/>
+        </p:txBody>
+      </p:sp>
+      <p:sp>
+        <p:nvSpPr>
+          <p:cNvPr id="23" name="Text 21"/>
+          <p:cNvSpPr/>
+          <p:nvPr/>
+        </p:nvSpPr>
+        <p:spPr>
+          <a:xfrm>
+            <a:off x="457200" y="6547104"/>
+            <a:ext cx="6400800" cy="310896"/>
+          </a:xfrm>
+          <a:prstGeom prst="rect">
+            <a:avLst/>
+          </a:prstGeom>
+          <a:noFill/>
+          <a:ln/>
+        </p:spPr>
+        <p:txBody>
+          <a:bodyPr wrap="square" lIns="0" tIns="0" rIns="0" bIns="0" rtlCol="0" anchor="ctr"/>
+          <a:lstStyle/>
+          <a:p>
+            <a:pPr indent="0" marL="0">
+              <a:buNone/>
+            </a:pPr>
+            <a:r>
+              <a:rPr lang="en-US" sz="850" dirty="0">
+                <a:solidFill>
+                  <a:srgbClr val="9FB3BD"/>
+                </a:solidFill>
+                <a:latin typeface="Calibri" pitchFamily="34" charset="0"/>
+                <a:ea typeface="Calibri" pitchFamily="34" charset="-122"/>
+                <a:cs typeface="Calibri" pitchFamily="34" charset="-120"/>
+              </a:rPr>
+              <a:t>ECOGRID RESORT™</a:t>
+            </a:r>
+            <a:endParaRPr lang="en-US" sz="850" dirty="0"/>
+          </a:p>
+        </p:txBody>
+      </p:sp>
+      <p:sp>
+        <p:nvSpPr>
+          <p:cNvPr id="24" name="Text 22"/>
+          <p:cNvSpPr/>
+          <p:nvPr/>
+        </p:nvSpPr>
+        <p:spPr>
+          <a:xfrm>
+            <a:off x="5486400" y="6547104"/>
+            <a:ext cx="6217920" cy="310896"/>
+          </a:xfrm>
+          <a:prstGeom prst="rect">
+            <a:avLst/>
+          </a:prstGeom>
+          <a:noFill/>
+          <a:ln/>
+        </p:spPr>
+        <p:txBody>
+          <a:bodyPr wrap="square" lIns="0" tIns="0" rIns="0" bIns="0" rtlCol="0" anchor="ctr"/>
+          <a:lstStyle/>
+          <a:p>
+            <a:pPr algn="r" indent="0" marL="0">
+              <a:buNone/>
+            </a:pPr>
+            <a:r>
+              <a:rPr lang="en-US" sz="850" dirty="0">
+                <a:solidFill>
+                  <a:srgbClr val="9FB3BD"/>
+                </a:solidFill>
+                <a:latin typeface="Calibri" pitchFamily="34" charset="0"/>
+                <a:ea typeface="Calibri" pitchFamily="34" charset="-122"/>
+                <a:cs typeface="Calibri" pitchFamily="34" charset="-120"/>
+              </a:rPr>
+              <a:t>Co-development &amp; co-investment proposal · May 2026</a:t>
+            </a:r>
+            <a:endParaRPr lang="en-US" sz="850" dirty="0"/>
           </a:p>
         </p:txBody>
       </p:sp>

--- a/SmartGrid/Commercial/ECOGRID_RESORT_Investors_EN.pptx
+++ b/SmartGrid/Commercial/ECOGRID_RESORT_Investors_EN.pptx
@@ -3758,7 +3758,7 @@
                 <a:ea typeface="Calibri" pitchFamily="34" charset="-122"/>
                 <a:cs typeface="Calibri" pitchFamily="34" charset="-120"/>
               </a:rPr>
-              <a:t>On-site solar PV: car-park shades, roofs, pergolas</a:t>
+              <a:t>On-site solar PV: carports, roofs, pergolas</a:t>
             </a:r>
             <a:endParaRPr lang="en-US" sz="1050" dirty="0"/>
           </a:p>
@@ -3782,7 +3782,7 @@
                 <a:ea typeface="Calibri" pitchFamily="34" charset="-122"/>
                 <a:cs typeface="Calibri" pitchFamily="34" charset="-120"/>
               </a:rPr>
-              <a:t>Turns idle surfaces into productive assets</a:t>
+              <a:t>Turns idle surfaces into productive assets. Wind turbine (optional complement where available)</a:t>
             </a:r>
             <a:endParaRPr lang="en-US" sz="1050" dirty="0"/>
           </a:p>
@@ -3927,7 +3927,7 @@
                 <a:ea typeface="Calibri" pitchFamily="34" charset="-122"/>
                 <a:cs typeface="Calibri" pitchFamily="34" charset="-120"/>
               </a:rPr>
-              <a:t>4–8 MWh LFP batteries: resilience + arbitrage</a:t>
+              <a:t>4–8 MWh LFP batteries (V2G-ready): resilience, arbitrage &amp; local network feed</a:t>
             </a:r>
             <a:endParaRPr lang="en-US" sz="1050" dirty="0"/>
           </a:p>
@@ -3951,7 +3951,7 @@
                 <a:ea typeface="Calibri" pitchFamily="34" charset="-122"/>
                 <a:cs typeface="Calibri" pitchFamily="34" charset="-120"/>
               </a:rPr>
-              <a:t>AI EMS forecasts and dispatches 24/7</a:t>
+              <a:t>AI EMS forecasts and dispatches 24/7 — including wind &amp; V2G sources</a:t>
             </a:r>
             <a:endParaRPr lang="en-US" sz="1050" dirty="0"/>
           </a:p>
@@ -4120,7 +4120,7 @@
                 <a:ea typeface="Calibri" pitchFamily="34" charset="-122"/>
                 <a:cs typeface="Calibri" pitchFamily="34" charset="-120"/>
               </a:rPr>
-              <a:t>30–50 EV charge points, smart charging</a:t>
+              <a:t>30–50 EV charge points — smart charging + V2G feedback to local network</a:t>
             </a:r>
             <a:endParaRPr lang="en-US" sz="1050" dirty="0"/>
           </a:p>
@@ -4219,7 +4219,7 @@
                 <a:ea typeface="Georgia" pitchFamily="34" charset="-122"/>
                 <a:cs typeface="Georgia" pitchFamily="34" charset="-120"/>
               </a:rPr>
-              <a:t>Engage &amp; report</a:t>
+              <a:t>Engage &amp; measure</a:t>
             </a:r>
             <a:endParaRPr lang="en-US" sz="1400" dirty="0"/>
           </a:p>
@@ -4265,7 +4265,7 @@
                 <a:ea typeface="Calibri" pitchFamily="34" charset="-122"/>
                 <a:cs typeface="Calibri" pitchFamily="34" charset="-120"/>
               </a:rPr>
-              <a:t>Guest app: EcoScore, EV booking, rewards</a:t>
+              <a:t>Guest app: EcoScore, real-time savings &amp; CO₂ tracker, EV booking, V2G rewards — personalised stay report at checkout</a:t>
             </a:r>
             <a:endParaRPr lang="en-US" sz="1050" dirty="0"/>
           </a:p>
